--- a/e2e/fixtures/text-features.pptx
+++ b/e2e/fixtures/text-features.pptx
@@ -1034,7 +1034,7 @@
                 <a:ea typeface="Calibri"/>
                 <a:cs typeface="Calibri"/>
               </a:rPr>
-              <a:t>Slide 1</a:t>
+              <a:t>Slide #</a:t>
             </a:r>
             <a:endParaRPr lang="en-US"/>
           </a:p>

--- a/e2e/fixtures/text-features.pptx
+++ b/e2e/fixtures/text-features.pptx
@@ -1034,8 +1034,19 @@
                 <a:ea typeface="Calibri"/>
                 <a:cs typeface="Calibri"/>
               </a:rPr>
-              <a:t>Slide #</a:t>
-            </a:r>
+              <a:t>Slide </a:t>
+            </a:r>
+            <a:fld type="slidenum" id="{F8166F1F-CE9B-4651-A6AA-CD717754DC9D}">
+              <a:rPr lang="en-US" dirty="0" sz="4050" b="1">
+                <a:solidFill>
+                  <a:srgbClr val="ffffff"/>
+                </a:solidFill>
+                <a:latin typeface="Calibri"/>
+                <a:ea typeface="Calibri"/>
+                <a:cs typeface="Calibri"/>
+              </a:rPr>
+              <a:t>#</a:t>
+            </a:fld>
             <a:endParaRPr lang="en-US"/>
           </a:p>
         </p:txBody>
